--- a/app/static/exports/人工智能教育应用_AI_PPT.pptx
+++ b/app/static/exports/人工智能教育应用_AI_PPT.pptx
@@ -3163,7 +3163,7 @@
           <a:lstStyle/>
           <a:p>
             <a:r>
-              <a:t>人工智能与教育的结合背景</a:t>
+              <a:t>人工智能与教育的结合</a:t>
             </a:r>
           </a:p>
         </p:txBody>
@@ -3184,17 +3184,17 @@
           <a:lstStyle/>
           <a:p>
             <a:r>
-              <a:t>传统教育模式的局限性</a:t>
-            </a:r>
-          </a:p>
-          <a:p>
-            <a:r>
-              <a:t>信息技术发展对教育的影响</a:t>
-            </a:r>
-          </a:p>
-          <a:p>
-            <a:r>
-              <a:t>人工智能技术的兴起与普及</a:t>
+              <a:t>人工智能技术的发展历程及其对教育领域的渗透</a:t>
+            </a:r>
+          </a:p>
+          <a:p>
+            <a:r>
+              <a:t>传统教育模式与AI技术融合的必要性</a:t>
+            </a:r>
+          </a:p>
+          <a:p>
+            <a:r>
+              <a:t>人工智能在教育中的主要应用场景概述</a:t>
             </a:r>
           </a:p>
         </p:txBody>
@@ -3233,7 +3233,7 @@
           <a:lstStyle/>
           <a:p>
             <a:r>
-              <a:t>人工智能在教育中的主要应用</a:t>
+              <a:t>人工智能在教学中的具体应用</a:t>
             </a:r>
           </a:p>
         </p:txBody>
@@ -3254,17 +3254,17 @@
           <a:lstStyle/>
           <a:p>
             <a:r>
-              <a:t>智能教学系统与个性化学习</a:t>
-            </a:r>
-          </a:p>
-          <a:p>
-            <a:r>
-              <a:t>自动化评估与反馈机制</a:t>
-            </a:r>
-          </a:p>
-          <a:p>
-            <a:r>
-              <a:t>虚拟助教与智能答疑系统</a:t>
+              <a:t>智能教学系统：个性化学习路径推荐</a:t>
+            </a:r>
+          </a:p>
+          <a:p>
+            <a:r>
+              <a:t>自动化作业批改与反馈机制</a:t>
+            </a:r>
+          </a:p>
+          <a:p>
+            <a:r>
+              <a:t>虚拟助教与智能问答系统提升教学效率</a:t>
             </a:r>
           </a:p>
         </p:txBody>
@@ -3303,7 +3303,7 @@
           <a:lstStyle/>
           <a:p>
             <a:r>
-              <a:t>人工智能教育的挑战与未来展望</a:t>
+              <a:t>人工智能对教育的影响与挑战</a:t>
             </a:r>
           </a:p>
         </p:txBody>
@@ -3324,17 +3324,17 @@
           <a:lstStyle/>
           <a:p>
             <a:r>
-              <a:t>数据隐私与伦理问题</a:t>
-            </a:r>
-          </a:p>
-          <a:p>
-            <a:r>
-              <a:t>教师角色的转变与技能提升</a:t>
-            </a:r>
-          </a:p>
-          <a:p>
-            <a:r>
-              <a:t>未来教育模式的发展趋势</a:t>
+              <a:t>提升学习效率与资源公平分配的可能性</a:t>
+            </a:r>
+          </a:p>
+          <a:p>
+            <a:r>
+              <a:t>教师角色的转变与技能需求变化</a:t>
+            </a:r>
+          </a:p>
+          <a:p>
+            <a:r>
+              <a:t>数据隐私、算法偏见与伦理问题的探讨</a:t>
             </a:r>
           </a:p>
         </p:txBody>
